--- a/slides/2026-soil-information-systems-for-decision-making-in-africa.pptx
+++ b/slides/2026-soil-information-systems-for-decision-making-in-africa.pptx
@@ -41,6 +41,8 @@
     <p:sldId id="289" r:id="rId35"/>
     <p:sldId id="290" r:id="rId36"/>
     <p:sldId id="291" r:id="rId37"/>
+    <p:sldId id="292" r:id="rId38"/>
+    <p:sldId id="293" r:id="rId39"/>
   </p:sldIdLst>
   <p:sldSz cx="9144000" cy="5143500" type="screen16x9"/>
   <p:notesSz cx="6858000" cy="9144000"/>
@@ -3258,7 +3260,7 @@
             </a:pPr>
             <a:r>
               <a:rPr/>
-              <a:t>What is a dataset?</a:t>
+              <a:t>FAIR principles</a:t>
             </a:r>
           </a:p>
         </p:txBody>
@@ -3278,17 +3280,50 @@
           <a:bodyPr/>
           <a:lstStyle/>
           <a:p>
-            <a:pPr lvl="0"/>
-            <a:r>
-              <a:rPr/>
-              <a:t>civil cervant: a database which is continuously updated, exposed via an API</a:t>
-            </a:r>
-          </a:p>
-          <a:p>
-            <a:pPr lvl="0"/>
-            <a:r>
-              <a:rPr/>
-              <a:t>academic: a validated collection of records at a given point in time, which I can uniquely reference in my publication</a:t>
+            <a:pPr lvl="0" indent="0" marL="0">
+              <a:buNone/>
+            </a:pPr>
+            <a:r>
+              <a:rPr/>
+              <a:t>The </a:t>
+            </a:r>
+            <a:r>
+              <a:rPr>
+                <a:hlinkClick r:id="rId2"/>
+              </a:rPr>
+              <a:t>FAIR principles</a:t>
+            </a:r>
+            <a:r>
+              <a:rPr/>
+              <a:t> provide a governance framework for data, from a reuse perspective:</a:t>
+            </a:r>
+          </a:p>
+          <a:p>
+            <a:pPr lvl="0"/>
+            <a:r>
+              <a:rPr/>
+              <a:t>Findable</a:t>
+            </a:r>
+          </a:p>
+          <a:p>
+            <a:pPr lvl="0"/>
+            <a:r>
+              <a:rPr/>
+              <a:t>Accessible</a:t>
+            </a:r>
+          </a:p>
+          <a:p>
+            <a:pPr lvl="0"/>
+            <a:r>
+              <a:rPr/>
+              <a:t>Interoperable</a:t>
+            </a:r>
+          </a:p>
+          <a:p>
+            <a:pPr lvl="0"/>
+            <a:r>
+              <a:rPr/>
+              <a:t>Reusable</a:t>
             </a:r>
           </a:p>
         </p:txBody>
@@ -3335,7 +3370,7 @@
             </a:pPr>
             <a:r>
               <a:rPr/>
-              <a:t>Datasets as a source for digital soil mapping (DSM)</a:t>
+              <a:t>Findable data</a:t>
             </a:r>
           </a:p>
         </p:txBody>
@@ -3355,31 +3390,23 @@
           <a:bodyPr/>
           <a:lstStyle/>
           <a:p>
-            <a:pPr lvl="0"/>
-            <a:r>
-              <a:rPr/>
-              <a:t>DSM is the process of prediction of soil property distribution in space and time</a:t>
-            </a:r>
-          </a:p>
-          <a:p>
-            <a:pPr lvl="0"/>
-            <a:r>
-              <a:rPr/>
-              <a:t>DSM efforts happen irragularly, based on latest snapshots of source data and covariates</a:t>
-            </a:r>
-          </a:p>
-          <a:p>
-            <a:pPr lvl="0"/>
-            <a:r>
-              <a:rPr/>
-              <a:t>data from the own organisation as well as remote sources</a:t>
-            </a:r>
-          </a:p>
-          <a:p>
-            <a:pPr lvl="0"/>
-            <a:r>
-              <a:rPr/>
-              <a:t>the academic view on dataset is more appropriate for DSM</a:t>
+            <a:pPr lvl="0" indent="0" marL="0">
+              <a:buNone/>
+            </a:pPr>
+            <a:r>
+              <a:rPr/>
+              <a:t>Rich metadata searchable via a catalogue</a:t>
+            </a:r>
+          </a:p>
+          <a:p>
+            <a:pPr lvl="0" indent="0" marL="0">
+              <a:buNone/>
+            </a:pPr>
+            <a:r>
+              <a:rPr>
+                <a:hlinkClick r:id="rId2"/>
+              </a:rPr>
+              <a:t>Let’s try</a:t>
             </a:r>
           </a:p>
         </p:txBody>
@@ -3426,7 +3453,7 @@
             </a:pPr>
             <a:r>
               <a:rPr/>
-              <a:t>Use of repositories</a:t>
+              <a:t>What is a dataset?</a:t>
             </a:r>
           </a:p>
         </p:txBody>
@@ -3449,48 +3476,14 @@
             <a:pPr lvl="0"/>
             <a:r>
               <a:rPr/>
-              <a:t>Easy to find and reference</a:t>
-            </a:r>
-          </a:p>
-          <a:p>
-            <a:pPr lvl="0"/>
-            <a:r>
-              <a:rPr/>
-              <a:t>Find today, find in 10 years time</a:t>
-            </a:r>
-          </a:p>
-          <a:p>
-            <a:pPr lvl="0"/>
-            <a:r>
-              <a:rPr/>
-              <a:t>Common data and knowledge repositories offer persitent storage over time</a:t>
-            </a:r>
-          </a:p>
-          <a:p>
-            <a:pPr lvl="0"/>
-            <a:r>
-              <a:rPr/>
-              <a:t>Aggregators (</a:t>
-            </a:r>
-            <a:r>
-              <a:rPr>
-                <a:hlinkClick r:id="rId2"/>
-              </a:rPr>
-              <a:t>openaire</a:t>
-            </a:r>
-            <a:r>
-              <a:rPr/>
-              <a:t>, </a:t>
-            </a:r>
-            <a:r>
-              <a:rPr>
-                <a:hlinkClick r:id="rId3"/>
-              </a:rPr>
-              <a:t>google</a:t>
-            </a:r>
-            <a:r>
-              <a:rPr/>
-              <a:t>) harvest from repositories to optimize findability</a:t>
+              <a:t>civil cervant: a database which is continuously updated, exposed via an API</a:t>
+            </a:r>
+          </a:p>
+          <a:p>
+            <a:pPr lvl="0"/>
+            <a:r>
+              <a:rPr/>
+              <a:t>academic: a validated collection of records at a given point in time, which I can reference from my publication</a:t>
             </a:r>
           </a:p>
         </p:txBody>
@@ -3537,7 +3530,7 @@
             </a:pPr>
             <a:r>
               <a:rPr/>
-              <a:t>Persistent Identification is an aspect of findability (identifiers)</a:t>
+              <a:t>Datasets as a source for digital soil mapping (DSM)</a:t>
             </a:r>
           </a:p>
         </p:txBody>
@@ -3560,28 +3553,28 @@
             <a:pPr lvl="0"/>
             <a:r>
               <a:rPr/>
-              <a:t>datasets should be uniquely identified (uuid)</a:t>
-            </a:r>
-          </a:p>
-          <a:p>
-            <a:pPr lvl="0"/>
-            <a:r>
-              <a:rPr/>
-              <a:t>Strong push to adopt identification platforms such as DOI and Handle.net</a:t>
-            </a:r>
-          </a:p>
-          <a:p>
-            <a:pPr lvl="0"/>
-            <a:r>
-              <a:rPr/>
-              <a:t>Proper identification facilitates citation from reports/scientific articles</a:t>
-            </a:r>
-          </a:p>
-          <a:p>
-            <a:pPr lvl="0"/>
-            <a:r>
-              <a:rPr/>
-              <a:t>For large data, or specific use cases (map vizualisation), data can also be shared using an api or web service, but it complicates identification</a:t>
+              <a:t>DSM is the process of prediction of soil property distribution in space and time</a:t>
+            </a:r>
+          </a:p>
+          <a:p>
+            <a:pPr lvl="0"/>
+            <a:r>
+              <a:rPr/>
+              <a:t>DSM efforts happen irragularly, based on latest snapshots of source data and covariates</a:t>
+            </a:r>
+          </a:p>
+          <a:p>
+            <a:pPr lvl="0"/>
+            <a:r>
+              <a:rPr/>
+              <a:t>Data from the own organisation as well as remote sources</a:t>
+            </a:r>
+          </a:p>
+          <a:p>
+            <a:pPr lvl="0"/>
+            <a:r>
+              <a:rPr/>
+              <a:t>The academic view on dataset is more appropriate for DSM</a:t>
             </a:r>
           </a:p>
         </p:txBody>
@@ -3628,7 +3621,7 @@
             </a:pPr>
             <a:r>
               <a:rPr/>
-              <a:t>Accessible data</a:t>
+              <a:t>Use of repositories</a:t>
             </a:r>
           </a:p>
         </p:txBody>
@@ -3651,21 +3644,48 @@
             <a:pPr lvl="0"/>
             <a:r>
               <a:rPr/>
-              <a:t>Data is made available through an open protocol (http)</a:t>
-            </a:r>
-          </a:p>
-          <a:p>
-            <a:pPr lvl="0"/>
-            <a:r>
-              <a:rPr/>
-              <a:t>Metadata should still exist, even if the data itself is discarded</a:t>
-            </a:r>
-          </a:p>
-          <a:p>
-            <a:pPr lvl="0"/>
-            <a:r>
-              <a:rPr/>
-              <a:t>Metadata Public; Data public, protected or internal</a:t>
+              <a:t>Easy to find and reference</a:t>
+            </a:r>
+          </a:p>
+          <a:p>
+            <a:pPr lvl="0"/>
+            <a:r>
+              <a:rPr/>
+              <a:t>Find today, find in 10 years time</a:t>
+            </a:r>
+          </a:p>
+          <a:p>
+            <a:pPr lvl="0"/>
+            <a:r>
+              <a:rPr/>
+              <a:t>Common data and knowledge repositories offer persitent storage over time</a:t>
+            </a:r>
+          </a:p>
+          <a:p>
+            <a:pPr lvl="0"/>
+            <a:r>
+              <a:rPr/>
+              <a:t>Aggregators (</a:t>
+            </a:r>
+            <a:r>
+              <a:rPr>
+                <a:hlinkClick r:id="rId2"/>
+              </a:rPr>
+              <a:t>openaire</a:t>
+            </a:r>
+            <a:r>
+              <a:rPr/>
+              <a:t>, </a:t>
+            </a:r>
+            <a:r>
+              <a:rPr>
+                <a:hlinkClick r:id="rId3"/>
+              </a:rPr>
+              <a:t>google</a:t>
+            </a:r>
+            <a:r>
+              <a:rPr/>
+              <a:t>) harvest from repositories to optimize findability</a:t>
             </a:r>
           </a:p>
         </p:txBody>
@@ -3712,7 +3732,7 @@
             </a:pPr>
             <a:r>
               <a:rPr/>
-              <a:t>Tiered access and national stewardship</a:t>
+              <a:t>Persistent Identification is an aspect of findability (identifiers)</a:t>
             </a:r>
           </a:p>
         </p:txBody>
@@ -3735,28 +3755,28 @@
             <a:pPr lvl="0"/>
             <a:r>
               <a:rPr/>
-              <a:t>As open as possible, as closed as necessary</a:t>
-            </a:r>
-          </a:p>
-          <a:p>
-            <a:pPr lvl="0"/>
-            <a:r>
-              <a:rPr/>
-              <a:t>As data steward you should have control on access to the data, even when handed over to a secondary hosting provider (repository)</a:t>
-            </a:r>
-          </a:p>
-          <a:p>
-            <a:pPr lvl="0"/>
-            <a:r>
-              <a:rPr/>
-              <a:t>Alternatively author the DOI of the data, arbitrary where the data is hosted</a:t>
-            </a:r>
-          </a:p>
-          <a:p>
-            <a:pPr lvl="0"/>
-            <a:r>
-              <a:rPr/>
-              <a:t>Ultimately the enclosed metadata indicates the usage restrictions of the data</a:t>
+              <a:t>Datasets should be uniquely identified (uuid)</a:t>
+            </a:r>
+          </a:p>
+          <a:p>
+            <a:pPr lvl="0"/>
+            <a:r>
+              <a:rPr/>
+              <a:t>Strong push to adopt identification platforms such as DOI and Handle.net</a:t>
+            </a:r>
+          </a:p>
+          <a:p>
+            <a:pPr lvl="0"/>
+            <a:r>
+              <a:rPr/>
+              <a:t>Proper identification facilitates citation from reports/scientific articles</a:t>
+            </a:r>
+          </a:p>
+          <a:p>
+            <a:pPr lvl="0"/>
+            <a:r>
+              <a:rPr/>
+              <a:t>For large data, or specific use cases (map vizualisation), data can also be shared using an api or web service, but it complicates identification</a:t>
             </a:r>
           </a:p>
         </p:txBody>
@@ -3803,7 +3823,7 @@
             </a:pPr>
             <a:r>
               <a:rPr/>
-              <a:t>Interoperable data</a:t>
+              <a:t>Accessible data</a:t>
             </a:r>
           </a:p>
         </p:txBody>
@@ -3823,12 +3843,31 @@
           <a:bodyPr/>
           <a:lstStyle/>
           <a:p>
-            <a:pPr lvl="0" indent="0" marL="0">
-              <a:buNone/>
-            </a:pPr>
-            <a:r>
-              <a:rPr/>
-              <a:t>Use standardized data formats and controlled vocabularies to enable data exchange and reuse across tools and disciplines</a:t>
+            <a:pPr lvl="0"/>
+            <a:r>
+              <a:rPr/>
+              <a:t>Data is made available through an open protocol (http)</a:t>
+            </a:r>
+          </a:p>
+          <a:p>
+            <a:pPr lvl="0"/>
+            <a:r>
+              <a:rPr/>
+              <a:t>Metadata should still exist, even if the data itself is no longer available</a:t>
+            </a:r>
+          </a:p>
+          <a:p>
+            <a:pPr lvl="0"/>
+            <a:r>
+              <a:rPr/>
+              <a:t>Metadata Public; Data public, protected or internal</a:t>
+            </a:r>
+          </a:p>
+          <a:p>
+            <a:pPr lvl="0"/>
+            <a:r>
+              <a:rPr/>
+              <a:t>Use an Open Format</a:t>
             </a:r>
           </a:p>
         </p:txBody>
@@ -3875,7 +3914,7 @@
             </a:pPr>
             <a:r>
               <a:rPr/>
-              <a:t>Process of standardisation</a:t>
+              <a:t>Tiered access and national stewardship</a:t>
             </a:r>
           </a:p>
         </p:txBody>
@@ -3898,39 +3937,28 @@
             <a:pPr lvl="0"/>
             <a:r>
               <a:rPr/>
-              <a:t>Standardised Operating procedure (Field and Laboratory)</a:t>
-            </a:r>
-          </a:p>
-          <a:p>
-            <a:pPr lvl="1"/>
-            <a:r>
-              <a:rPr>
-                <a:hlinkClick r:id="rId2"/>
-              </a:rPr>
-              <a:t>GSP Glosolan</a:t>
-            </a:r>
-          </a:p>
-          <a:p>
-            <a:pPr lvl="1"/>
-            <a:r>
-              <a:rPr>
-                <a:hlinkClick r:id="rId3"/>
-              </a:rPr>
-              <a:t>Soils for Africa project</a:t>
-            </a:r>
-          </a:p>
-          <a:p>
-            <a:pPr lvl="0"/>
-            <a:r>
-              <a:rPr/>
-              <a:t>Describe existing practices</a:t>
-            </a:r>
-          </a:p>
-          <a:p>
-            <a:pPr lvl="0"/>
-            <a:r>
-              <a:rPr/>
-              <a:t>Refer to common vocabularies</a:t>
+              <a:t>As open as possible, as closed as necessary</a:t>
+            </a:r>
+          </a:p>
+          <a:p>
+            <a:pPr lvl="0"/>
+            <a:r>
+              <a:rPr/>
+              <a:t>As data steward you should have control on access to the data, even when handed over to a secondary hosting provider (repository)</a:t>
+            </a:r>
+          </a:p>
+          <a:p>
+            <a:pPr lvl="0"/>
+            <a:r>
+              <a:rPr/>
+              <a:t>Alternatively author the DOI of the data, arbitrary where the data is hosted</a:t>
+            </a:r>
+          </a:p>
+          <a:p>
+            <a:pPr lvl="0"/>
+            <a:r>
+              <a:rPr/>
+              <a:t>Ultimately the enclosed metadata indicates the usage restrictions of the data</a:t>
             </a:r>
           </a:p>
         </p:txBody>
@@ -3941,6 +3969,271 @@
 </file>
 
 <file path=ppt/slides/slide18.xml><?xml version="1.0" encoding="utf-8"?>
+<p:sld xmlns:a="http://schemas.openxmlformats.org/drawingml/2006/main" xmlns:r="http://schemas.openxmlformats.org/officeDocument/2006/relationships" xmlns:p="http://schemas.openxmlformats.org/presentationml/2006/main">
+  <p:cSld>
+    <p:spTree>
+      <p:nvGrpSpPr>
+        <p:cNvPr id="1" name=""/>
+        <p:cNvGrpSpPr/>
+        <p:nvPr/>
+      </p:nvGrpSpPr>
+      <p:grpSpPr>
+        <a:xfrm>
+          <a:off x="0" y="0"/>
+          <a:ext cx="0" cy="0"/>
+          <a:chOff x="0" y="0"/>
+          <a:chExt cx="0" cy="0"/>
+        </a:xfrm>
+      </p:grpSpPr>
+      <p:sp>
+        <p:nvSpPr>
+          <p:cNvPr id="2" name="Title 1"/>
+          <p:cNvSpPr>
+            <a:spLocks noGrp="1"/>
+          </p:cNvSpPr>
+          <p:nvPr>
+            <p:ph type="title"/>
+          </p:nvPr>
+        </p:nvSpPr>
+        <p:spPr/>
+        <p:txBody>
+          <a:bodyPr/>
+          <a:lstStyle/>
+          <a:p>
+            <a:pPr lvl="0" indent="0" marL="0">
+              <a:buNone/>
+            </a:pPr>
+            <a:r>
+              <a:rPr/>
+              <a:t>Interoperable data</a:t>
+            </a:r>
+          </a:p>
+        </p:txBody>
+      </p:sp>
+      <p:sp>
+        <p:nvSpPr>
+          <p:cNvPr id="3" name="Content Placeholder 2"/>
+          <p:cNvSpPr>
+            <a:spLocks noGrp="1"/>
+          </p:cNvSpPr>
+          <p:nvPr>
+            <p:ph idx="1"/>
+          </p:nvPr>
+        </p:nvSpPr>
+        <p:spPr/>
+        <p:txBody>
+          <a:bodyPr/>
+          <a:lstStyle/>
+          <a:p>
+            <a:pPr lvl="0" indent="0" marL="0">
+              <a:buNone/>
+            </a:pPr>
+            <a:r>
+              <a:rPr/>
+              <a:t>Use standardized data formats and controlled vocabularies to enable data exchange and reuse across tools and disciplines</a:t>
+            </a:r>
+          </a:p>
+        </p:txBody>
+      </p:sp>
+    </p:spTree>
+  </p:cSld>
+</p:sld>
+</file>
+
+<file path=ppt/slides/slide19.xml><?xml version="1.0" encoding="utf-8"?>
+<p:sld xmlns:a="http://schemas.openxmlformats.org/drawingml/2006/main" xmlns:r="http://schemas.openxmlformats.org/officeDocument/2006/relationships" xmlns:p="http://schemas.openxmlformats.org/presentationml/2006/main">
+  <p:cSld>
+    <p:spTree>
+      <p:nvGrpSpPr>
+        <p:cNvPr id="1" name=""/>
+        <p:cNvGrpSpPr/>
+        <p:nvPr/>
+      </p:nvGrpSpPr>
+      <p:grpSpPr>
+        <a:xfrm>
+          <a:off x="0" y="0"/>
+          <a:ext cx="0" cy="0"/>
+          <a:chOff x="0" y="0"/>
+          <a:chExt cx="0" cy="0"/>
+        </a:xfrm>
+      </p:grpSpPr>
+      <p:sp>
+        <p:nvSpPr>
+          <p:cNvPr id="2" name="Title 1"/>
+          <p:cNvSpPr>
+            <a:spLocks noGrp="1"/>
+          </p:cNvSpPr>
+          <p:nvPr>
+            <p:ph type="title"/>
+          </p:nvPr>
+        </p:nvSpPr>
+        <p:spPr/>
+        <p:txBody>
+          <a:bodyPr/>
+          <a:lstStyle/>
+          <a:p>
+            <a:pPr lvl="0" indent="0" marL="0">
+              <a:buNone/>
+            </a:pPr>
+            <a:r>
+              <a:rPr/>
+              <a:t>Process of standardisation</a:t>
+            </a:r>
+          </a:p>
+        </p:txBody>
+      </p:sp>
+      <p:sp>
+        <p:nvSpPr>
+          <p:cNvPr id="3" name="Content Placeholder 2"/>
+          <p:cNvSpPr>
+            <a:spLocks noGrp="1"/>
+          </p:cNvSpPr>
+          <p:nvPr>
+            <p:ph idx="1"/>
+          </p:nvPr>
+        </p:nvSpPr>
+        <p:spPr/>
+        <p:txBody>
+          <a:bodyPr/>
+          <a:lstStyle/>
+          <a:p>
+            <a:pPr lvl="0"/>
+            <a:r>
+              <a:rPr/>
+              <a:t>If you standardise upfront, you don’t need to harmonize later</a:t>
+            </a:r>
+          </a:p>
+          <a:p>
+            <a:pPr lvl="0"/>
+            <a:r>
+              <a:rPr/>
+              <a:t>Standardised Operating procedure (Field and Laboratory)</a:t>
+            </a:r>
+          </a:p>
+          <a:p>
+            <a:pPr lvl="1"/>
+            <a:r>
+              <a:rPr>
+                <a:hlinkClick r:id="rId2"/>
+              </a:rPr>
+              <a:t>GSP Glosolan</a:t>
+            </a:r>
+          </a:p>
+          <a:p>
+            <a:pPr lvl="1"/>
+            <a:r>
+              <a:rPr>
+                <a:hlinkClick r:id="rId3"/>
+              </a:rPr>
+              <a:t>Soils for Africa project</a:t>
+            </a:r>
+          </a:p>
+          <a:p>
+            <a:pPr lvl="0"/>
+            <a:r>
+              <a:rPr/>
+              <a:t>Describe the procedure used to collect or process the data</a:t>
+            </a:r>
+          </a:p>
+          <a:p>
+            <a:pPr lvl="0"/>
+            <a:r>
+              <a:rPr/>
+              <a:t>Refer to common vocabularies</a:t>
+            </a:r>
+          </a:p>
+        </p:txBody>
+      </p:sp>
+    </p:spTree>
+  </p:cSld>
+</p:sld>
+</file>
+
+<file path=ppt/slides/slide2.xml><?xml version="1.0" encoding="utf-8"?>
+<p:sld xmlns:a="http://schemas.openxmlformats.org/drawingml/2006/main" xmlns:r="http://schemas.openxmlformats.org/officeDocument/2006/relationships" xmlns:p="http://schemas.openxmlformats.org/presentationml/2006/main">
+  <p:cSld>
+    <p:spTree>
+      <p:nvGrpSpPr>
+        <p:cNvPr id="1" name=""/>
+        <p:cNvGrpSpPr/>
+        <p:nvPr/>
+      </p:nvGrpSpPr>
+      <p:grpSpPr>
+        <a:xfrm>
+          <a:off x="0" y="0"/>
+          <a:ext cx="0" cy="0"/>
+          <a:chOff x="0" y="0"/>
+          <a:chExt cx="0" cy="0"/>
+        </a:xfrm>
+      </p:grpSpPr>
+      <p:sp>
+        <p:nvSpPr>
+          <p:cNvPr id="2" name="Title 1"/>
+          <p:cNvSpPr>
+            <a:spLocks noGrp="1"/>
+          </p:cNvSpPr>
+          <p:nvPr>
+            <p:ph type="title"/>
+          </p:nvPr>
+        </p:nvSpPr>
+        <p:spPr/>
+        <p:txBody>
+          <a:bodyPr/>
+          <a:lstStyle/>
+          <a:p>
+            <a:pPr lvl="0" indent="0" marL="0">
+              <a:buNone/>
+            </a:pPr>
+            <a:r>
+              <a:rPr/>
+              <a:t>ISRIC</a:t>
+            </a:r>
+          </a:p>
+        </p:txBody>
+      </p:sp>
+      <p:sp>
+        <p:nvSpPr>
+          <p:cNvPr id="3" name="Content Placeholder 2"/>
+          <p:cNvSpPr>
+            <a:spLocks noGrp="1"/>
+          </p:cNvSpPr>
+          <p:nvPr>
+            <p:ph idx="1"/>
+          </p:nvPr>
+        </p:nvSpPr>
+        <p:spPr/>
+        <p:txBody>
+          <a:bodyPr/>
+          <a:lstStyle/>
+          <a:p>
+            <a:pPr lvl="0"/>
+            <a:r>
+              <a:rPr/>
+              <a:t>ISRIC - World Soil Information has been founded in 1966 after designation to the Netherlands by Unesco, in close cooperation with FAO and IUSS</a:t>
+            </a:r>
+          </a:p>
+          <a:p>
+            <a:pPr lvl="0"/>
+            <a:r>
+              <a:rPr/>
+              <a:t>The institute with its unique global soil monolith collection is hosted at Wageningen University</a:t>
+            </a:r>
+          </a:p>
+          <a:p>
+            <a:pPr lvl="0"/>
+            <a:r>
+              <a:rPr/>
+              <a:t>ISRIC contributes to data collection and standardization efforts globally, with a special focus on Africa</a:t>
+            </a:r>
+          </a:p>
+        </p:txBody>
+      </p:sp>
+    </p:spTree>
+  </p:cSld>
+</p:sld>
+</file>
+
+<file path=ppt/slides/slide20.xml><?xml version="1.0" encoding="utf-8"?>
 <p:sld xmlns:a="http://schemas.openxmlformats.org/drawingml/2006/main" xmlns:r="http://schemas.openxmlformats.org/officeDocument/2006/relationships" xmlns:p="http://schemas.openxmlformats.org/presentationml/2006/main">
   <p:cSld>
     <p:spTree>
@@ -4049,265 +4342,6 @@
 </p:sld>
 </file>
 
-<file path=ppt/slides/slide19.xml><?xml version="1.0" encoding="utf-8"?>
-<p:sld xmlns:a="http://schemas.openxmlformats.org/drawingml/2006/main" xmlns:r="http://schemas.openxmlformats.org/officeDocument/2006/relationships" xmlns:p="http://schemas.openxmlformats.org/presentationml/2006/main">
-  <p:cSld>
-    <p:spTree>
-      <p:nvGrpSpPr>
-        <p:cNvPr id="1" name=""/>
-        <p:cNvGrpSpPr/>
-        <p:nvPr/>
-      </p:nvGrpSpPr>
-      <p:grpSpPr>
-        <a:xfrm>
-          <a:off x="0" y="0"/>
-          <a:ext cx="0" cy="0"/>
-          <a:chOff x="0" y="0"/>
-          <a:chExt cx="0" cy="0"/>
-        </a:xfrm>
-      </p:grpSpPr>
-      <p:sp>
-        <p:nvSpPr>
-          <p:cNvPr id="2" name="Title 1"/>
-          <p:cNvSpPr>
-            <a:spLocks noGrp="1"/>
-          </p:cNvSpPr>
-          <p:nvPr>
-            <p:ph type="title"/>
-          </p:nvPr>
-        </p:nvSpPr>
-        <p:spPr/>
-        <p:txBody>
-          <a:bodyPr/>
-          <a:lstStyle/>
-          <a:p>
-            <a:pPr lvl="0" indent="0" marL="0">
-              <a:buNone/>
-            </a:pPr>
-            <a:r>
-              <a:rPr/>
-              <a:t>Role of common vocabularies</a:t>
-            </a:r>
-          </a:p>
-        </p:txBody>
-      </p:sp>
-      <p:sp>
-        <p:nvSpPr>
-          <p:cNvPr id="3" name="Content Placeholder 2"/>
-          <p:cNvSpPr>
-            <a:spLocks noGrp="1"/>
-          </p:cNvSpPr>
-          <p:nvPr>
-            <p:ph idx="1"/>
-          </p:nvPr>
-        </p:nvSpPr>
-        <p:spPr/>
-        <p:txBody>
-          <a:bodyPr/>
-          <a:lstStyle/>
-          <a:p>
-            <a:pPr lvl="0"/>
-            <a:r>
-              <a:rPr/>
-              <a:t>The use of common multi-lingual vocabularies provide a mechanism to describe data using universal definitions</a:t>
-            </a:r>
-          </a:p>
-          <a:p>
-            <a:pPr lvl="0"/>
-            <a:r>
-              <a:rPr/>
-              <a:t>Common vocabularies such as Agrovoc, WRB, GLOSIS, ISO11074, GEMET</a:t>
-            </a:r>
-          </a:p>
-          <a:p>
-            <a:pPr lvl="0"/>
-            <a:r>
-              <a:rPr/>
-              <a:t>Use Agrovoc terms as keywords in metadata</a:t>
-            </a:r>
-          </a:p>
-          <a:p>
-            <a:pPr lvl="0"/>
-            <a:r>
-              <a:rPr/>
-              <a:t>Describe columns in a dataset using terms from GLOSIS</a:t>
-            </a:r>
-          </a:p>
-          <a:p>
-            <a:pPr lvl="0"/>
-            <a:r>
-              <a:rPr/>
-              <a:t>Express unit of measure using QUDT concepts</a:t>
-            </a:r>
-          </a:p>
-        </p:txBody>
-      </p:sp>
-    </p:spTree>
-  </p:cSld>
-</p:sld>
-</file>
-
-<file path=ppt/slides/slide2.xml><?xml version="1.0" encoding="utf-8"?>
-<p:sld xmlns:a="http://schemas.openxmlformats.org/drawingml/2006/main" xmlns:r="http://schemas.openxmlformats.org/officeDocument/2006/relationships" xmlns:p="http://schemas.openxmlformats.org/presentationml/2006/main">
-  <p:cSld>
-    <p:spTree>
-      <p:nvGrpSpPr>
-        <p:cNvPr id="1" name=""/>
-        <p:cNvGrpSpPr/>
-        <p:nvPr/>
-      </p:nvGrpSpPr>
-      <p:grpSpPr>
-        <a:xfrm>
-          <a:off x="0" y="0"/>
-          <a:ext cx="0" cy="0"/>
-          <a:chOff x="0" y="0"/>
-          <a:chExt cx="0" cy="0"/>
-        </a:xfrm>
-      </p:grpSpPr>
-      <p:sp>
-        <p:nvSpPr>
-          <p:cNvPr id="2" name="Title 1"/>
-          <p:cNvSpPr>
-            <a:spLocks noGrp="1"/>
-          </p:cNvSpPr>
-          <p:nvPr>
-            <p:ph type="title"/>
-          </p:nvPr>
-        </p:nvSpPr>
-        <p:spPr/>
-        <p:txBody>
-          <a:bodyPr/>
-          <a:lstStyle/>
-          <a:p>
-            <a:pPr lvl="0" indent="0" marL="0">
-              <a:buNone/>
-            </a:pPr>
-            <a:r>
-              <a:rPr/>
-              <a:t>ISRIC</a:t>
-            </a:r>
-          </a:p>
-        </p:txBody>
-      </p:sp>
-      <p:sp>
-        <p:nvSpPr>
-          <p:cNvPr id="3" name="Content Placeholder 2"/>
-          <p:cNvSpPr>
-            <a:spLocks noGrp="1"/>
-          </p:cNvSpPr>
-          <p:nvPr>
-            <p:ph idx="1"/>
-          </p:nvPr>
-        </p:nvSpPr>
-        <p:spPr/>
-        <p:txBody>
-          <a:bodyPr/>
-          <a:lstStyle/>
-          <a:p>
-            <a:pPr lvl="0"/>
-            <a:r>
-              <a:rPr/>
-              <a:t>ISRIC - World Soil Information has been founded in 1966 after designation to the Netherlands by Unesco, in close cooperation with FAO and IUSS</a:t>
-            </a:r>
-          </a:p>
-          <a:p>
-            <a:pPr lvl="0"/>
-            <a:r>
-              <a:rPr/>
-              <a:t>The institute with its unique global soil monolith collection is hosted at Wageningen University</a:t>
-            </a:r>
-          </a:p>
-          <a:p>
-            <a:pPr lvl="0"/>
-            <a:r>
-              <a:rPr/>
-              <a:t>ISRIC contributes to data collection and standardization efforts globally, with a special focus on Africa</a:t>
-            </a:r>
-          </a:p>
-        </p:txBody>
-      </p:sp>
-    </p:spTree>
-  </p:cSld>
-</p:sld>
-</file>
-
-<file path=ppt/slides/slide20.xml><?xml version="1.0" encoding="utf-8"?>
-<p:sld xmlns:a="http://schemas.openxmlformats.org/drawingml/2006/main" xmlns:r="http://schemas.openxmlformats.org/officeDocument/2006/relationships" xmlns:p="http://schemas.openxmlformats.org/presentationml/2006/main">
-  <p:cSld>
-    <p:spTree>
-      <p:nvGrpSpPr>
-        <p:cNvPr id="1" name=""/>
-        <p:cNvGrpSpPr/>
-        <p:nvPr/>
-      </p:nvGrpSpPr>
-      <p:grpSpPr>
-        <a:xfrm>
-          <a:off x="0" y="0"/>
-          <a:ext cx="0" cy="0"/>
-          <a:chOff x="0" y="0"/>
-          <a:chExt cx="0" cy="0"/>
-        </a:xfrm>
-      </p:grpSpPr>
-      <p:sp>
-        <p:nvSpPr>
-          <p:cNvPr id="2" name="Title 1"/>
-          <p:cNvSpPr>
-            <a:spLocks noGrp="1"/>
-          </p:cNvSpPr>
-          <p:nvPr>
-            <p:ph type="title"/>
-          </p:nvPr>
-        </p:nvSpPr>
-        <p:spPr/>
-        <p:txBody>
-          <a:bodyPr/>
-          <a:lstStyle/>
-          <a:p>
-            <a:pPr lvl="0" indent="0" marL="0">
-              <a:buNone/>
-            </a:pPr>
-            <a:r>
-              <a:rPr/>
-              <a:t>Reusable data</a:t>
-            </a:r>
-          </a:p>
-        </p:txBody>
-      </p:sp>
-      <p:sp>
-        <p:nvSpPr>
-          <p:cNvPr id="3" name="Content Placeholder 2"/>
-          <p:cNvSpPr>
-            <a:spLocks noGrp="1"/>
-          </p:cNvSpPr>
-          <p:nvPr>
-            <p:ph idx="1"/>
-          </p:nvPr>
-        </p:nvSpPr>
-        <p:spPr/>
-        <p:txBody>
-          <a:bodyPr/>
-          <a:lstStyle/>
-          <a:p>
-            <a:pPr lvl="0"/>
-            <a:r>
-              <a:rPr/>
-              <a:t>Describe the provenance of the data, so potential users understand if and how they can use the data.</a:t>
-            </a:r>
-          </a:p>
-          <a:p>
-            <a:pPr lvl="0"/>
-            <a:r>
-              <a:rPr/>
-              <a:t>Apply a relevant license; as open as possible, as closed as necessary</a:t>
-            </a:r>
-          </a:p>
-        </p:txBody>
-      </p:sp>
-    </p:spTree>
-  </p:cSld>
-</p:sld>
-</file>
-
 <file path=ppt/slides/slide21.xml><?xml version="1.0" encoding="utf-8"?>
 <p:sld xmlns:a="http://schemas.openxmlformats.org/drawingml/2006/main" xmlns:r="http://schemas.openxmlformats.org/officeDocument/2006/relationships" xmlns:p="http://schemas.openxmlformats.org/presentationml/2006/main">
   <p:cSld>
@@ -4345,7 +4379,7 @@
             </a:pPr>
             <a:r>
               <a:rPr/>
-              <a:t>Describe a dataset using rich metadata for findability and resuability</a:t>
+              <a:t>Role of common vocabularies</a:t>
             </a:r>
           </a:p>
         </p:txBody>
@@ -4368,14 +4402,35 @@
             <a:pPr lvl="0"/>
             <a:r>
               <a:rPr/>
-              <a:t>Generic properties are covered in most metadata models</a:t>
-            </a:r>
-          </a:p>
-          <a:p>
-            <a:pPr lvl="0"/>
-            <a:r>
-              <a:rPr/>
-              <a:t>Metadata model can be extended by adding a metadata sidecar file (RO-Crate approach)</a:t>
+              <a:t>The use of common multi-lingual vocabularies provide a mechanism to describe data using universal definitions</a:t>
+            </a:r>
+          </a:p>
+          <a:p>
+            <a:pPr lvl="0"/>
+            <a:r>
+              <a:rPr/>
+              <a:t>Common vocabularies such as Agrovoc, WRB, GLOSIS, ISO11074, GEMET</a:t>
+            </a:r>
+          </a:p>
+          <a:p>
+            <a:pPr lvl="0"/>
+            <a:r>
+              <a:rPr/>
+              <a:t>Use Agrovoc terms as keywords in metadata</a:t>
+            </a:r>
+          </a:p>
+          <a:p>
+            <a:pPr lvl="0"/>
+            <a:r>
+              <a:rPr/>
+              <a:t>Describe columns in a dataset using terms from GLOSIS</a:t>
+            </a:r>
+          </a:p>
+          <a:p>
+            <a:pPr lvl="0"/>
+            <a:r>
+              <a:rPr/>
+              <a:t>Express unit of measure using QUDT concepts</a:t>
             </a:r>
           </a:p>
         </p:txBody>
@@ -4422,7 +4477,7 @@
             </a:pPr>
             <a:r>
               <a:rPr/>
-              <a:t>Use of common repositories</a:t>
+              <a:t>Reusable data</a:t>
             </a:r>
           </a:p>
         </p:txBody>
@@ -4445,42 +4500,14 @@
             <a:pPr lvl="0"/>
             <a:r>
               <a:rPr/>
-              <a:t>Common repositories, such as Zenodo, OSF, Pangaea, Dataverse, offer many of the FAIR principles by default</a:t>
-            </a:r>
-          </a:p>
-          <a:p>
-            <a:pPr lvl="0"/>
-            <a:r>
-              <a:rPr/>
-              <a:t>As a contributor you are owner of the data</a:t>
-            </a:r>
-          </a:p>
-          <a:p>
-            <a:pPr lvl="0"/>
-            <a:r>
-              <a:rPr/>
-              <a:t>Data can be published with tiered access</a:t>
-            </a:r>
-          </a:p>
-          <a:p>
-            <a:pPr lvl="0"/>
-            <a:r>
-              <a:rPr/>
-              <a:t>Funders may endorse the use of a certain repository</a:t>
-            </a:r>
-          </a:p>
-          <a:p>
-            <a:pPr lvl="0"/>
-            <a:r>
-              <a:rPr/>
-              <a:t>Understand the jurisdiction of the country where the repository is hosted</a:t>
-            </a:r>
-          </a:p>
-          <a:p>
-            <a:pPr lvl="0"/>
-            <a:r>
-              <a:rPr/>
-              <a:t>Consider the reliability of the repository (timespan 20-50 years)</a:t>
+              <a:t>Describe the provenance of the data, so potential users understand if and how they can use the data.</a:t>
+            </a:r>
+          </a:p>
+          <a:p>
+            <a:pPr lvl="0"/>
+            <a:r>
+              <a:rPr/>
+              <a:t>Apply a relevant license; as open as possible, as closed as necessary</a:t>
             </a:r>
           </a:p>
         </p:txBody>
@@ -4527,7 +4554,7 @@
             </a:pPr>
             <a:r>
               <a:rPr/>
-              <a:t>Some data publication samples</a:t>
+              <a:t>Describe a dataset using rich metadata for findability and resuability</a:t>
             </a:r>
           </a:p>
         </p:txBody>
@@ -4549,28 +4576,15 @@
           <a:p>
             <a:pPr lvl="0"/>
             <a:r>
-              <a:rPr>
-                <a:hlinkClick r:id="rId2"/>
-              </a:rPr>
-              <a:t>Soils for Africa</a:t>
-            </a:r>
-          </a:p>
-          <a:p>
-            <a:pPr lvl="0"/>
-            <a:r>
-              <a:rPr>
-                <a:hlinkClick r:id="rId3"/>
-              </a:rPr>
-              <a:t>Tanzania SIS</a:t>
-            </a:r>
-          </a:p>
-          <a:p>
-            <a:pPr lvl="0"/>
-            <a:r>
-              <a:rPr>
-                <a:hlinkClick r:id="rId4"/>
-              </a:rPr>
-              <a:t>Kenya SIS</a:t>
+              <a:rPr/>
+              <a:t>Generic properties are covered in most metadata models</a:t>
+            </a:r>
+          </a:p>
+          <a:p>
+            <a:pPr lvl="0"/>
+            <a:r>
+              <a:rPr/>
+              <a:t>Metadata model can be extended by adding a metadata sidecar file (RO-Crate approach)</a:t>
             </a:r>
           </a:p>
         </p:txBody>
@@ -4617,7 +4631,7 @@
             </a:pPr>
             <a:r>
               <a:rPr/>
-              <a:t>Data aggregators are not a good fit for publishing your data</a:t>
+              <a:t>Use of common repositories</a:t>
             </a:r>
           </a:p>
         </p:txBody>
@@ -4640,42 +4654,42 @@
             <a:pPr lvl="0"/>
             <a:r>
               <a:rPr/>
-              <a:t>Various soil data aggregators exist, which harmonize and clean soil data</a:t>
-            </a:r>
-          </a:p>
-          <a:p>
-            <a:pPr lvl="0"/>
-            <a:r>
-              <a:rPr/>
-              <a:t>Examples such as ISRIC, ISDA, Varda</a:t>
-            </a:r>
-          </a:p>
-          <a:p>
-            <a:pPr lvl="0"/>
-            <a:r>
-              <a:rPr/>
-              <a:t>The aggregators are able to make good soil maps</a:t>
-            </a:r>
-          </a:p>
-          <a:p>
-            <a:pPr lvl="0"/>
-            <a:r>
-              <a:rPr/>
-              <a:t>Data contributed to an aggregator is out of your control</a:t>
-            </a:r>
-          </a:p>
-          <a:p>
-            <a:pPr lvl="0"/>
-            <a:r>
-              <a:rPr/>
-              <a:t>Instead publish the data in a repository and share the DOI with the aggregator</a:t>
-            </a:r>
-          </a:p>
-          <a:p>
-            <a:pPr lvl="0"/>
-            <a:r>
-              <a:rPr/>
-              <a:t>The feedback from the aggregator about your data is actually very useful, make sure to retrieve it</a:t>
+              <a:t>Common repositories, such as Zenodo, OSF, Pangaea, Dataverse, offer many of the FAIR principles by default</a:t>
+            </a:r>
+          </a:p>
+          <a:p>
+            <a:pPr lvl="0"/>
+            <a:r>
+              <a:rPr/>
+              <a:t>As a contributor you are owner of the data</a:t>
+            </a:r>
+          </a:p>
+          <a:p>
+            <a:pPr lvl="0"/>
+            <a:r>
+              <a:rPr/>
+              <a:t>Data can be published with tiered access</a:t>
+            </a:r>
+          </a:p>
+          <a:p>
+            <a:pPr lvl="0"/>
+            <a:r>
+              <a:rPr/>
+              <a:t>Funders may endorse the use of a certain repository</a:t>
+            </a:r>
+          </a:p>
+          <a:p>
+            <a:pPr lvl="0"/>
+            <a:r>
+              <a:rPr/>
+              <a:t>Understand the jurisdiction of the country where the repository is hosted</a:t>
+            </a:r>
+          </a:p>
+          <a:p>
+            <a:pPr lvl="0"/>
+            <a:r>
+              <a:rPr/>
+              <a:t>Consider the reliability of the repository (timespan 20-50 years)</a:t>
             </a:r>
           </a:p>
         </p:txBody>
@@ -4722,7 +4736,7 @@
             </a:pPr>
             <a:r>
               <a:rPr/>
-              <a:t>Frameworks to support implementation</a:t>
+              <a:t>Some data publication samples</a:t>
             </a:r>
           </a:p>
         </p:txBody>
@@ -4743,53 +4757,29 @@
           <a:lstStyle/>
           <a:p>
             <a:pPr lvl="0"/>
-            <a:r>
-              <a:rPr/>
-              <a:t>Cabi and Gates foundation prepared a </a:t>
-            </a:r>
             <a:r>
               <a:rPr>
                 <a:hlinkClick r:id="rId2"/>
               </a:rPr>
-              <a:t>framework to put the FAIR principles in action</a:t>
-            </a:r>
-            <a:r>
-              <a:rPr/>
-              <a:t> in the environmental domain.</a:t>
-            </a:r>
-          </a:p>
-          <a:p>
-            <a:pPr lvl="0"/>
-            <a:r>
-              <a:rPr/>
-              <a:t>Cabi, ISRIC and Gates foundation also prepared a </a:t>
-            </a:r>
+              <a:t>Soils for Africa</a:t>
+            </a:r>
+          </a:p>
+          <a:p>
+            <a:pPr lvl="0"/>
             <a:r>
               <a:rPr>
                 <a:hlinkClick r:id="rId3"/>
               </a:rPr>
-              <a:t>framework for Soil Information System design</a:t>
-            </a:r>
-            <a:r>
-              <a:rPr/>
-              <a:t>.</a:t>
-            </a:r>
-          </a:p>
-          <a:p>
-            <a:pPr lvl="0"/>
-            <a:r>
-              <a:rPr/>
-              <a:t>The SIS framwork includes some </a:t>
-            </a:r>
+              <a:t>Tanzania SIS</a:t>
+            </a:r>
+          </a:p>
+          <a:p>
+            <a:pPr lvl="0"/>
             <a:r>
               <a:rPr>
                 <a:hlinkClick r:id="rId4"/>
               </a:rPr>
-              <a:t>case studies</a:t>
-            </a:r>
-            <a:r>
-              <a:rPr/>
-              <a:t> from various African countries.</a:t>
+              <a:t>Kenya SIS</a:t>
             </a:r>
           </a:p>
         </p:txBody>
@@ -4836,7 +4826,7 @@
             </a:pPr>
             <a:r>
               <a:rPr/>
-              <a:t>Conclusions</a:t>
+              <a:t>Data aggregators are not a good fit for publishing your data</a:t>
             </a:r>
           </a:p>
         </p:txBody>
@@ -4859,28 +4849,42 @@
             <a:pPr lvl="0"/>
             <a:r>
               <a:rPr/>
-              <a:t>Data governance is a wide topic, interoperability is an important pillar</a:t>
-            </a:r>
-          </a:p>
-          <a:p>
-            <a:pPr lvl="0"/>
-            <a:r>
-              <a:rPr/>
-              <a:t>FAIR principles provide a framework for governance focussed on reuse</a:t>
-            </a:r>
-          </a:p>
-          <a:p>
-            <a:pPr lvl="0"/>
-            <a:r>
-              <a:rPr/>
-              <a:t>Soil data is special for its specific use cases, interaction with many domains and long time span</a:t>
-            </a:r>
-          </a:p>
-          <a:p>
-            <a:pPr lvl="0"/>
-            <a:r>
-              <a:rPr/>
-              <a:t>Harmonization is important, but do not replace the source data</a:t>
+              <a:t>Various soil data aggregators exist, which harmonize and clean soil data</a:t>
+            </a:r>
+          </a:p>
+          <a:p>
+            <a:pPr lvl="0"/>
+            <a:r>
+              <a:rPr/>
+              <a:t>Examples such as ISRIC, ISDA, Varda</a:t>
+            </a:r>
+          </a:p>
+          <a:p>
+            <a:pPr lvl="0"/>
+            <a:r>
+              <a:rPr/>
+              <a:t>The aggregators are able to make good soil maps</a:t>
+            </a:r>
+          </a:p>
+          <a:p>
+            <a:pPr lvl="0"/>
+            <a:r>
+              <a:rPr/>
+              <a:t>Data contributed to an aggregator is out of your control</a:t>
+            </a:r>
+          </a:p>
+          <a:p>
+            <a:pPr lvl="0"/>
+            <a:r>
+              <a:rPr/>
+              <a:t>Instead publish the data in a repository and share the DOI with the aggregator</a:t>
+            </a:r>
+          </a:p>
+          <a:p>
+            <a:pPr lvl="0"/>
+            <a:r>
+              <a:rPr/>
+              <a:t>The feedback from the aggregator about your data is actually very useful, make sure to retrieve it</a:t>
             </a:r>
           </a:p>
         </p:txBody>
@@ -4927,7 +4931,74 @@
             </a:pPr>
             <a:r>
               <a:rPr/>
-              <a:t>Questions?</a:t>
+              <a:t>Frameworks to support implementation</a:t>
+            </a:r>
+          </a:p>
+        </p:txBody>
+      </p:sp>
+      <p:sp>
+        <p:nvSpPr>
+          <p:cNvPr id="3" name="Content Placeholder 2"/>
+          <p:cNvSpPr>
+            <a:spLocks noGrp="1"/>
+          </p:cNvSpPr>
+          <p:nvPr>
+            <p:ph idx="1"/>
+          </p:nvPr>
+        </p:nvSpPr>
+        <p:spPr/>
+        <p:txBody>
+          <a:bodyPr/>
+          <a:lstStyle/>
+          <a:p>
+            <a:pPr lvl="0"/>
+            <a:r>
+              <a:rPr/>
+              <a:t>Cabi and Gates foundation prepared a </a:t>
+            </a:r>
+            <a:r>
+              <a:rPr>
+                <a:hlinkClick r:id="rId2"/>
+              </a:rPr>
+              <a:t>framework to put the FAIR principles in action</a:t>
+            </a:r>
+            <a:r>
+              <a:rPr/>
+              <a:t> in the environmental domain.</a:t>
+            </a:r>
+          </a:p>
+          <a:p>
+            <a:pPr lvl="0"/>
+            <a:r>
+              <a:rPr/>
+              <a:t>Cabi, ISRIC and Gates foundation also prepared a </a:t>
+            </a:r>
+            <a:r>
+              <a:rPr>
+                <a:hlinkClick r:id="rId3"/>
+              </a:rPr>
+              <a:t>framework for Soil Information System design</a:t>
+            </a:r>
+            <a:r>
+              <a:rPr/>
+              <a:t>.</a:t>
+            </a:r>
+          </a:p>
+          <a:p>
+            <a:pPr lvl="0"/>
+            <a:r>
+              <a:rPr/>
+              <a:t>The SIS framwork includes some </a:t>
+            </a:r>
+            <a:r>
+              <a:rPr>
+                <a:hlinkClick r:id="rId4"/>
+              </a:rPr>
+              <a:t>case studies</a:t>
+            </a:r>
+            <a:r>
+              <a:rPr/>
+              <a:t> from various African countries.</a:t>
             </a:r>
           </a:p>
         </p:txBody>
@@ -4974,7 +5045,7 @@
             </a:pPr>
             <a:r>
               <a:rPr/>
-              <a:t>More details on data governance</a:t>
+              <a:t>Conclusions</a:t>
             </a:r>
           </a:p>
         </p:txBody>
@@ -4994,12 +5065,31 @@
           <a:bodyPr/>
           <a:lstStyle/>
           <a:p>
-            <a:pPr lvl="0" indent="0" marL="0">
-              <a:buNone/>
-            </a:pPr>
-            <a:r>
-              <a:rPr/>
-              <a:t>The extra slides provide some details on the topic of data governance</a:t>
+            <a:pPr lvl="0"/>
+            <a:r>
+              <a:rPr/>
+              <a:t>Data governance is a wide topic, interoperability is an important pillar</a:t>
+            </a:r>
+          </a:p>
+          <a:p>
+            <a:pPr lvl="0"/>
+            <a:r>
+              <a:rPr/>
+              <a:t>FAIR principles provide a framework for governance focussed on reuse</a:t>
+            </a:r>
+          </a:p>
+          <a:p>
+            <a:pPr lvl="0"/>
+            <a:r>
+              <a:rPr/>
+              <a:t>Soil data is special for its specific use cases, interaction with many domains and long time span</a:t>
+            </a:r>
+          </a:p>
+          <a:p>
+            <a:pPr lvl="0"/>
+            <a:r>
+              <a:rPr/>
+              <a:t>Harmonization is important, but do not replace the source data</a:t>
             </a:r>
           </a:p>
         </p:txBody>
@@ -5046,7 +5136,7 @@
             </a:pPr>
             <a:r>
               <a:rPr/>
-              <a:t>Roles, Responsibilities, and Accountability</a:t>
+              <a:t>Questions?</a:t>
             </a:r>
           </a:p>
         </p:txBody>
@@ -5066,24 +5156,12 @@
           <a:bodyPr/>
           <a:lstStyle/>
           <a:p>
-            <a:pPr lvl="0"/>
-            <a:r>
-              <a:rPr/>
-              <a:t>Define who owns, stewards, custodians, and uses data.</a:t>
-            </a:r>
-          </a:p>
-          <a:p>
-            <a:pPr lvl="0"/>
-            <a:r>
-              <a:rPr/>
-              <a:t>Establish decision-making bodies (e.g. data governance boards).</a:t>
-            </a:r>
-          </a:p>
-          <a:p>
-            <a:pPr lvl="0"/>
-            <a:r>
-              <a:rPr/>
-              <a:t>Clarify responsibilities across ministries, agencies, and local governments.</a:t>
+            <a:pPr lvl="0" indent="0" marL="0">
+              <a:buNone/>
+            </a:pPr>
+            <a:r>
+              <a:rPr/>
+              <a:t>Else I thank you very much for your interest. I hope I have been able to trigger some ideas. Let’s continue the conversation soon.</a:t>
             </a:r>
           </a:p>
         </p:txBody>
@@ -5130,58 +5208,75 @@
             </a:pPr>
             <a:r>
               <a:rPr/>
-              <a:t>Interoperability projects</a:t>
-            </a:r>
-          </a:p>
-        </p:txBody>
-      </p:sp>
-      <p:sp>
-        <p:nvSpPr>
-          <p:cNvPr id="3" name="Content Placeholder 2"/>
-          <p:cNvSpPr>
-            <a:spLocks noGrp="1"/>
-          </p:cNvSpPr>
+              <a:t>World Soil Museum</a:t>
+            </a:r>
+          </a:p>
+        </p:txBody>
+      </p:sp>
+      <p:pic>
+        <p:nvPicPr>
+          <p:cNvPr descr="https://tinker.nl/img/cache/media_6828_widen_3840-upscale_90-2349_world-soil-museum01_0.webp" id="0" name="Picture 1"/>
+          <p:cNvPicPr>
+            <a:picLocks noGrp="1" noChangeAspect="1"/>
+          </p:cNvPicPr>
+          <p:nvPr/>
+        </p:nvPicPr>
+        <p:blipFill>
+          <a:blip r:embed="rId2"/>
+          <a:stretch>
+            <a:fillRect/>
+          </a:stretch>
+        </p:blipFill>
+        <p:spPr bwMode="auto">
+          <a:xfrm>
+            <a:off x="2400300" y="1193800"/>
+            <a:ext cx="4330700" cy="2882900"/>
+          </a:xfrm>
+          <a:prstGeom prst="rect">
+            <a:avLst/>
+          </a:prstGeom>
+          <a:noFill/>
+          <a:ln w="9525">
+            <a:noFill/>
+            <a:headEnd/>
+            <a:tailEnd/>
+          </a:ln>
+        </p:spPr>
+      </p:pic>
+      <p:sp>
+        <p:nvSpPr>
+          <p:cNvPr id="1" name="TextBox 3"/>
+          <p:cNvSpPr txBox="1"/>
           <p:nvPr>
             <p:ph idx="1"/>
           </p:nvPr>
         </p:nvSpPr>
-        <p:spPr/>
-        <p:txBody>
-          <a:bodyPr/>
-          <a:lstStyle/>
-          <a:p>
-            <a:pPr lvl="0"/>
-            <a:r>
-              <a:rPr/>
-              <a:t>participated in the Global Soil Map project (2009-2013)</a:t>
-            </a:r>
-          </a:p>
-          <a:p>
-            <a:pPr lvl="0"/>
-            <a:r>
-              <a:rPr/>
-              <a:t>participated in the Africa Soil Information Service project (2009-2016)</a:t>
-            </a:r>
-          </a:p>
-          <a:p>
-            <a:pPr lvl="0"/>
-            <a:r>
-              <a:rPr/>
-              <a:t>hosted the recent Soils for Africa project (2021-2025)</a:t>
-            </a:r>
-          </a:p>
-          <a:p>
-            <a:pPr lvl="0"/>
-            <a:r>
-              <a:rPr/>
-              <a:t>contributes to the African Soil Observatory project (2025-2029)</a:t>
-            </a:r>
-          </a:p>
-          <a:p>
-            <a:pPr lvl="0"/>
-            <a:r>
-              <a:rPr/>
-              <a:t>hosts the WOSIS profiles database and the SoilGrids Global Soil Map (250m)</a:t>
+        <p:spPr>
+          <a:xfrm>
+            <a:off x="457200" y="4076700"/>
+            <a:ext cx="8229600" cy="508000"/>
+          </a:xfrm>
+          <a:prstGeom prst="rect">
+            <a:avLst/>
+          </a:prstGeom>
+          <a:noFill/>
+        </p:spPr>
+        <p:txBody>
+          <a:bodyPr/>
+          <a:lstStyle/>
+          <a:p>
+            <a:pPr lvl="0" indent="0" marL="0" algn="ctr">
+              <a:buNone/>
+            </a:pPr>
+            <a:r>
+              <a:rPr/>
+              <a:t>World Soil Museum by </a:t>
+            </a:r>
+            <a:r>
+              <a:rPr>
+                <a:hlinkClick r:id="rId3"/>
+              </a:rPr>
+              <a:t>tinker.nl</a:t>
             </a:r>
           </a:p>
         </p:txBody>
@@ -5228,7 +5323,7 @@
             </a:pPr>
             <a:r>
               <a:rPr/>
-              <a:t>Data Quality and Lifecycle Management</a:t>
+              <a:t>More details on data governance</a:t>
             </a:r>
           </a:p>
         </p:txBody>
@@ -5248,24 +5343,12 @@
           <a:bodyPr/>
           <a:lstStyle/>
           <a:p>
-            <a:pPr lvl="0"/>
-            <a:r>
-              <a:rPr/>
-              <a:t>Ensure data is accurate, complete, consistent, timely, and fit for purpose.</a:t>
-            </a:r>
-          </a:p>
-          <a:p>
-            <a:pPr lvl="0"/>
-            <a:r>
-              <a:rPr/>
-              <a:t>Define standards for data collection, validation, maintenance, archival, and disposal.</a:t>
-            </a:r>
-          </a:p>
-          <a:p>
-            <a:pPr lvl="0"/>
-            <a:r>
-              <a:rPr/>
-              <a:t>Monitor and improve data quality through metrics and audits.</a:t>
+            <a:pPr lvl="0" indent="0" marL="0">
+              <a:buNone/>
+            </a:pPr>
+            <a:r>
+              <a:rPr/>
+              <a:t>The extra slides provide some details on the topic of data governance</a:t>
             </a:r>
           </a:p>
         </p:txBody>
@@ -5312,7 +5395,7 @@
             </a:pPr>
             <a:r>
               <a:rPr/>
-              <a:t>Policies, Standards, and Interoperability</a:t>
+              <a:t>Roles, Responsibilities, and Accountability</a:t>
             </a:r>
           </a:p>
         </p:txBody>
@@ -5335,21 +5418,21 @@
             <a:pPr lvl="0"/>
             <a:r>
               <a:rPr/>
-              <a:t>Develop common data standards, metadata, reference data, and vocabularies.</a:t>
-            </a:r>
-          </a:p>
-          <a:p>
-            <a:pPr lvl="0"/>
-            <a:r>
-              <a:rPr/>
-              <a:t>Promote interoperability between government systems.</a:t>
-            </a:r>
-          </a:p>
-          <a:p>
-            <a:pPr lvl="0"/>
-            <a:r>
-              <a:rPr/>
-              <a:t>Standardize formats, identifiers, APIs, and data models to enable data sharing</a:t>
+              <a:t>Define who owns, stewards, custodians, and uses data.</a:t>
+            </a:r>
+          </a:p>
+          <a:p>
+            <a:pPr lvl="0"/>
+            <a:r>
+              <a:rPr/>
+              <a:t>Establish decision-making bodies (e.g. data governance boards).</a:t>
+            </a:r>
+          </a:p>
+          <a:p>
+            <a:pPr lvl="0"/>
+            <a:r>
+              <a:rPr/>
+              <a:t>Clarify responsibilities across ministries, agencies, and local governments.</a:t>
             </a:r>
           </a:p>
         </p:txBody>
@@ -5396,7 +5479,7 @@
             </a:pPr>
             <a:r>
               <a:rPr/>
-              <a:t>Security, Privacy, and Legal Compliance</a:t>
+              <a:t>Data Quality and Lifecycle Management</a:t>
             </a:r>
           </a:p>
         </p:txBody>
@@ -5419,21 +5502,21 @@
             <a:pPr lvl="0"/>
             <a:r>
               <a:rPr/>
-              <a:t>Protect sensitive and personal information.</a:t>
-            </a:r>
-          </a:p>
-          <a:p>
-            <a:pPr lvl="0"/>
-            <a:r>
-              <a:rPr/>
-              <a:t>Comply with relevant legislation (e.g. GDPR, freedom of information laws, records management requirements).</a:t>
-            </a:r>
-          </a:p>
-          <a:p>
-            <a:pPr lvl="0"/>
-            <a:r>
-              <a:rPr/>
-              <a:t>Define access controls, classification schemes, and procedures for handling breaches.</a:t>
+              <a:t>Ensure data is accurate, complete, consistent, timely, and fit for purpose.</a:t>
+            </a:r>
+          </a:p>
+          <a:p>
+            <a:pPr lvl="0"/>
+            <a:r>
+              <a:rPr/>
+              <a:t>Define standards for data collection, validation, maintenance, archival, and disposal.</a:t>
+            </a:r>
+          </a:p>
+          <a:p>
+            <a:pPr lvl="0"/>
+            <a:r>
+              <a:rPr/>
+              <a:t>Monitor and improve data quality through metrics and audits.</a:t>
             </a:r>
           </a:p>
         </p:txBody>
@@ -5444,6 +5527,174 @@
 </file>
 
 <file path=ppt/slides/slide33.xml><?xml version="1.0" encoding="utf-8"?>
+<p:sld xmlns:a="http://schemas.openxmlformats.org/drawingml/2006/main" xmlns:r="http://schemas.openxmlformats.org/officeDocument/2006/relationships" xmlns:p="http://schemas.openxmlformats.org/presentationml/2006/main">
+  <p:cSld>
+    <p:spTree>
+      <p:nvGrpSpPr>
+        <p:cNvPr id="1" name=""/>
+        <p:cNvGrpSpPr/>
+        <p:nvPr/>
+      </p:nvGrpSpPr>
+      <p:grpSpPr>
+        <a:xfrm>
+          <a:off x="0" y="0"/>
+          <a:ext cx="0" cy="0"/>
+          <a:chOff x="0" y="0"/>
+          <a:chExt cx="0" cy="0"/>
+        </a:xfrm>
+      </p:grpSpPr>
+      <p:sp>
+        <p:nvSpPr>
+          <p:cNvPr id="2" name="Title 1"/>
+          <p:cNvSpPr>
+            <a:spLocks noGrp="1"/>
+          </p:cNvSpPr>
+          <p:nvPr>
+            <p:ph type="title"/>
+          </p:nvPr>
+        </p:nvSpPr>
+        <p:spPr/>
+        <p:txBody>
+          <a:bodyPr/>
+          <a:lstStyle/>
+          <a:p>
+            <a:pPr lvl="0" indent="0" marL="0">
+              <a:buNone/>
+            </a:pPr>
+            <a:r>
+              <a:rPr/>
+              <a:t>Policies, Standards, and Interoperability</a:t>
+            </a:r>
+          </a:p>
+        </p:txBody>
+      </p:sp>
+      <p:sp>
+        <p:nvSpPr>
+          <p:cNvPr id="3" name="Content Placeholder 2"/>
+          <p:cNvSpPr>
+            <a:spLocks noGrp="1"/>
+          </p:cNvSpPr>
+          <p:nvPr>
+            <p:ph idx="1"/>
+          </p:nvPr>
+        </p:nvSpPr>
+        <p:spPr/>
+        <p:txBody>
+          <a:bodyPr/>
+          <a:lstStyle/>
+          <a:p>
+            <a:pPr lvl="0"/>
+            <a:r>
+              <a:rPr/>
+              <a:t>Develop common data standards, metadata, reference data, and vocabularies.</a:t>
+            </a:r>
+          </a:p>
+          <a:p>
+            <a:pPr lvl="0"/>
+            <a:r>
+              <a:rPr/>
+              <a:t>Promote interoperability between government systems.</a:t>
+            </a:r>
+          </a:p>
+          <a:p>
+            <a:pPr lvl="0"/>
+            <a:r>
+              <a:rPr/>
+              <a:t>Standardize formats, identifiers, APIs, and data models to enable data sharing</a:t>
+            </a:r>
+          </a:p>
+        </p:txBody>
+      </p:sp>
+    </p:spTree>
+  </p:cSld>
+</p:sld>
+</file>
+
+<file path=ppt/slides/slide34.xml><?xml version="1.0" encoding="utf-8"?>
+<p:sld xmlns:a="http://schemas.openxmlformats.org/drawingml/2006/main" xmlns:r="http://schemas.openxmlformats.org/officeDocument/2006/relationships" xmlns:p="http://schemas.openxmlformats.org/presentationml/2006/main">
+  <p:cSld>
+    <p:spTree>
+      <p:nvGrpSpPr>
+        <p:cNvPr id="1" name=""/>
+        <p:cNvGrpSpPr/>
+        <p:nvPr/>
+      </p:nvGrpSpPr>
+      <p:grpSpPr>
+        <a:xfrm>
+          <a:off x="0" y="0"/>
+          <a:ext cx="0" cy="0"/>
+          <a:chOff x="0" y="0"/>
+          <a:chExt cx="0" cy="0"/>
+        </a:xfrm>
+      </p:grpSpPr>
+      <p:sp>
+        <p:nvSpPr>
+          <p:cNvPr id="2" name="Title 1"/>
+          <p:cNvSpPr>
+            <a:spLocks noGrp="1"/>
+          </p:cNvSpPr>
+          <p:nvPr>
+            <p:ph type="title"/>
+          </p:nvPr>
+        </p:nvSpPr>
+        <p:spPr/>
+        <p:txBody>
+          <a:bodyPr/>
+          <a:lstStyle/>
+          <a:p>
+            <a:pPr lvl="0" indent="0" marL="0">
+              <a:buNone/>
+            </a:pPr>
+            <a:r>
+              <a:rPr/>
+              <a:t>Security, Privacy, and Legal Compliance</a:t>
+            </a:r>
+          </a:p>
+        </p:txBody>
+      </p:sp>
+      <p:sp>
+        <p:nvSpPr>
+          <p:cNvPr id="3" name="Content Placeholder 2"/>
+          <p:cNvSpPr>
+            <a:spLocks noGrp="1"/>
+          </p:cNvSpPr>
+          <p:nvPr>
+            <p:ph idx="1"/>
+          </p:nvPr>
+        </p:nvSpPr>
+        <p:spPr/>
+        <p:txBody>
+          <a:bodyPr/>
+          <a:lstStyle/>
+          <a:p>
+            <a:pPr lvl="0"/>
+            <a:r>
+              <a:rPr/>
+              <a:t>Protect sensitive and personal information.</a:t>
+            </a:r>
+          </a:p>
+          <a:p>
+            <a:pPr lvl="0"/>
+            <a:r>
+              <a:rPr/>
+              <a:t>Comply with relevant legislation (e.g. GDPR, freedom of information laws, records management requirements).</a:t>
+            </a:r>
+          </a:p>
+          <a:p>
+            <a:pPr lvl="0"/>
+            <a:r>
+              <a:rPr/>
+              <a:t>Define access controls, classification schemes, and procedures for handling breaches.</a:t>
+            </a:r>
+          </a:p>
+        </p:txBody>
+      </p:sp>
+    </p:spTree>
+  </p:cSld>
+</p:sld>
+</file>
+
+<file path=ppt/slides/slide35.xml><?xml version="1.0" encoding="utf-8"?>
 <p:sld xmlns:a="http://schemas.openxmlformats.org/drawingml/2006/main" xmlns:r="http://schemas.openxmlformats.org/officeDocument/2006/relationships" xmlns:p="http://schemas.openxmlformats.org/presentationml/2006/main">
   <p:cSld>
     <p:spTree>
@@ -5712,7 +5963,7 @@
 </p:sld>
 </file>
 
-<file path=ppt/slides/slide34.xml><?xml version="1.0" encoding="utf-8"?>
+<file path=ppt/slides/slide36.xml><?xml version="1.0" encoding="utf-8"?>
 <p:sld xmlns:a="http://schemas.openxmlformats.org/drawingml/2006/main" xmlns:r="http://schemas.openxmlformats.org/officeDocument/2006/relationships" xmlns:p="http://schemas.openxmlformats.org/presentationml/2006/main">
   <p:cSld>
     <p:spTree>
@@ -5810,7 +6061,7 @@
 </p:sld>
 </file>
 
-<file path=ppt/slides/slide35.xml><?xml version="1.0" encoding="utf-8"?>
+<file path=ppt/slides/slide37.xml><?xml version="1.0" encoding="utf-8"?>
 <p:sld xmlns:a="http://schemas.openxmlformats.org/drawingml/2006/main" xmlns:r="http://schemas.openxmlformats.org/officeDocument/2006/relationships" xmlns:p="http://schemas.openxmlformats.org/presentationml/2006/main">
   <p:cSld>
     <p:spTree>
@@ -5894,7 +6145,7 @@
 </p:sld>
 </file>
 
-<file path=ppt/slides/slide36.xml><?xml version="1.0" encoding="utf-8"?>
+<file path=ppt/slides/slide38.xml><?xml version="1.0" encoding="utf-8"?>
 <p:sld xmlns:a="http://schemas.openxmlformats.org/drawingml/2006/main" xmlns:r="http://schemas.openxmlformats.org/officeDocument/2006/relationships" xmlns:p="http://schemas.openxmlformats.org/presentationml/2006/main">
   <p:cSld>
     <p:spTree>
@@ -6029,51 +6280,69 @@
             </a:pPr>
             <a:r>
               <a:rPr/>
-              <a:t>Paul van Genuchten</a:t>
-            </a:r>
-          </a:p>
-        </p:txBody>
-      </p:sp>
-      <p:sp>
-        <p:nvSpPr>
-          <p:cNvPr id="3" name="Content Placeholder 2"/>
-          <p:cNvSpPr>
-            <a:spLocks noGrp="1"/>
-          </p:cNvSpPr>
+              <a:t>Collection of reference profiles</a:t>
+            </a:r>
+          </a:p>
+        </p:txBody>
+      </p:sp>
+      <p:pic>
+        <p:nvPicPr>
+          <p:cNvPr descr="https://isric.euwest01.umbraco.io/media/dpbdg2ib/color-pot.jpg" id="0" name="Picture 1"/>
+          <p:cNvPicPr>
+            <a:picLocks noGrp="1" noChangeAspect="1"/>
+          </p:cNvPicPr>
+          <p:nvPr/>
+        </p:nvPicPr>
+        <p:blipFill>
+          <a:blip r:embed="rId2"/>
+          <a:stretch>
+            <a:fillRect/>
+          </a:stretch>
+        </p:blipFill>
+        <p:spPr bwMode="auto">
+          <a:xfrm>
+            <a:off x="2425700" y="1193800"/>
+            <a:ext cx="4279900" cy="2882900"/>
+          </a:xfrm>
+          <a:prstGeom prst="rect">
+            <a:avLst/>
+          </a:prstGeom>
+          <a:noFill/>
+          <a:ln w="9525">
+            <a:noFill/>
+            <a:headEnd/>
+            <a:tailEnd/>
+          </a:ln>
+        </p:spPr>
+      </p:pic>
+      <p:sp>
+        <p:nvSpPr>
+          <p:cNvPr id="1" name="TextBox 3"/>
+          <p:cNvSpPr txBox="1"/>
           <p:nvPr>
             <p:ph idx="1"/>
           </p:nvPr>
         </p:nvSpPr>
-        <p:spPr/>
-        <p:txBody>
-          <a:bodyPr/>
-          <a:lstStyle/>
-          <a:p>
-            <a:pPr lvl="0"/>
-            <a:r>
-              <a:rPr/>
-              <a:t>Trained as a soil scientist (Wageningen University, 1999)</a:t>
-            </a:r>
-          </a:p>
-          <a:p>
-            <a:pPr lvl="0"/>
-            <a:r>
-              <a:rPr/>
-              <a:t>Extensive experience in spatial data and IT</a:t>
-            </a:r>
-          </a:p>
-          <a:p>
-            <a:pPr lvl="0"/>
-            <a:r>
-              <a:rPr/>
-              <a:t>Joined ISRIC four years ago as a Data Infrastructure Specialist</a:t>
-            </a:r>
-          </a:p>
-          <a:p>
-            <a:pPr lvl="0"/>
-            <a:r>
-              <a:rPr/>
-              <a:t>Maintains ISRIC’s data infrastructure and contributes to soil data management projects, with a focus on metadata and interoperability</a:t>
+        <p:spPr>
+          <a:xfrm>
+            <a:off x="457200" y="4076700"/>
+            <a:ext cx="8229600" cy="508000"/>
+          </a:xfrm>
+          <a:prstGeom prst="rect">
+            <a:avLst/>
+          </a:prstGeom>
+          <a:noFill/>
+        </p:spPr>
+        <p:txBody>
+          <a:bodyPr/>
+          <a:lstStyle/>
+          <a:p>
+            <a:pPr lvl="0" indent="0" marL="0" algn="ctr">
+              <a:buNone/>
+            </a:pPr>
+            <a:r>
+              <a:rPr/>
+              <a:t>Samples of reference profiles</a:t>
             </a:r>
           </a:p>
         </p:txBody>
@@ -6120,7 +6389,7 @@
             </a:pPr>
             <a:r>
               <a:rPr/>
-              <a:t>Interoperability and data governance</a:t>
+              <a:t>Interoperability projects</a:t>
             </a:r>
           </a:p>
         </p:txBody>
@@ -6143,21 +6412,35 @@
             <a:pPr lvl="0"/>
             <a:r>
               <a:rPr/>
-              <a:t>I was asked to present about these 2 topics</a:t>
-            </a:r>
-          </a:p>
-          <a:p>
-            <a:pPr lvl="0"/>
-            <a:r>
-              <a:rPr/>
-              <a:t>Interoperability is a pillar of data governance</a:t>
-            </a:r>
-          </a:p>
-          <a:p>
-            <a:pPr lvl="0"/>
-            <a:r>
-              <a:rPr/>
-              <a:t>Both are large topics…</a:t>
+              <a:t>participated in the Global Soil Map project (2009-2013)</a:t>
+            </a:r>
+          </a:p>
+          <a:p>
+            <a:pPr lvl="0"/>
+            <a:r>
+              <a:rPr/>
+              <a:t>participated in the Africa Soil Information Service project (2009-2016)</a:t>
+            </a:r>
+          </a:p>
+          <a:p>
+            <a:pPr lvl="0"/>
+            <a:r>
+              <a:rPr/>
+              <a:t>hosted the recent Soils for Africa project (2021-2025)</a:t>
+            </a:r>
+          </a:p>
+          <a:p>
+            <a:pPr lvl="0"/>
+            <a:r>
+              <a:rPr/>
+              <a:t>contributes to the African Soil Observatory project (2025-2029)</a:t>
+            </a:r>
+          </a:p>
+          <a:p>
+            <a:pPr lvl="0"/>
+            <a:r>
+              <a:rPr/>
+              <a:t>hosts the WOSIS profiles database and the SoilGrids Global Soil Map (250m)</a:t>
             </a:r>
           </a:p>
         </p:txBody>
@@ -6204,7 +6487,7 @@
             </a:pPr>
             <a:r>
               <a:rPr/>
-              <a:t>Data governance</a:t>
+              <a:t>Paul van Genuchten</a:t>
             </a:r>
           </a:p>
         </p:txBody>
@@ -6227,35 +6510,35 @@
             <a:pPr lvl="0"/>
             <a:r>
               <a:rPr/>
-              <a:t>Roles, Responsibilities, and Accountability</a:t>
-            </a:r>
-          </a:p>
-          <a:p>
-            <a:pPr lvl="0"/>
-            <a:r>
-              <a:rPr/>
-              <a:t>Data Quality and Lifecycle Management</a:t>
-            </a:r>
-          </a:p>
-          <a:p>
-            <a:pPr lvl="0"/>
-            <a:r>
-              <a:rPr/>
-              <a:t>Policies, Standards, and Interoperability</a:t>
-            </a:r>
-          </a:p>
-          <a:p>
-            <a:pPr lvl="0"/>
-            <a:r>
-              <a:rPr/>
-              <a:t>Security, Privacy, and Legal Compliance</a:t>
-            </a:r>
-          </a:p>
-          <a:p>
-            <a:pPr lvl="0"/>
-            <a:r>
-              <a:rPr/>
-              <a:t>Data Sharing, Access, and Value Creation</a:t>
+              <a:t>Trained as a soil scientist (Wageningen University, 1999)</a:t>
+            </a:r>
+          </a:p>
+          <a:p>
+            <a:pPr lvl="0"/>
+            <a:r>
+              <a:rPr/>
+              <a:t>Extensive experience in spatial data and IT</a:t>
+            </a:r>
+          </a:p>
+          <a:p>
+            <a:pPr lvl="0"/>
+            <a:r>
+              <a:rPr/>
+              <a:t>Joined ISRIC four years ago as a Data Infrastructure Specialist</a:t>
+            </a:r>
+          </a:p>
+          <a:p>
+            <a:pPr lvl="0"/>
+            <a:r>
+              <a:rPr/>
+              <a:t>Team maintains ISRIC’s data infrastructure</a:t>
+            </a:r>
+          </a:p>
+          <a:p>
+            <a:pPr lvl="0"/>
+            <a:r>
+              <a:rPr/>
+              <a:t>contributes to soil data management projects, with a focus on metadata and interoperability</a:t>
             </a:r>
           </a:p>
         </p:txBody>
@@ -6302,7 +6585,7 @@
             </a:pPr>
             <a:r>
               <a:rPr/>
-              <a:t>FAIR principles</a:t>
+              <a:t>Interoperability and data governance</a:t>
             </a:r>
           </a:p>
         </p:txBody>
@@ -6322,50 +6605,24 @@
           <a:bodyPr/>
           <a:lstStyle/>
           <a:p>
-            <a:pPr lvl="0" indent="0" marL="0">
-              <a:buNone/>
-            </a:pPr>
-            <a:r>
-              <a:rPr/>
-              <a:t>The </a:t>
-            </a:r>
-            <a:r>
-              <a:rPr>
-                <a:hlinkClick r:id="rId2"/>
-              </a:rPr>
-              <a:t>FAIR principles</a:t>
-            </a:r>
-            <a:r>
-              <a:rPr/>
-              <a:t> provide a governance framework for data, from a reuse perspective:</a:t>
-            </a:r>
-          </a:p>
-          <a:p>
-            <a:pPr lvl="0"/>
-            <a:r>
-              <a:rPr/>
-              <a:t>Findable</a:t>
-            </a:r>
-          </a:p>
-          <a:p>
-            <a:pPr lvl="0"/>
-            <a:r>
-              <a:rPr/>
-              <a:t>Accessible</a:t>
-            </a:r>
-          </a:p>
-          <a:p>
-            <a:pPr lvl="0"/>
-            <a:r>
-              <a:rPr/>
-              <a:t>Interoperable</a:t>
-            </a:r>
-          </a:p>
-          <a:p>
-            <a:pPr lvl="0"/>
-            <a:r>
-              <a:rPr/>
-              <a:t>Reusable</a:t>
+            <a:pPr lvl="0"/>
+            <a:r>
+              <a:rPr/>
+              <a:t>I was asked to present about these 2 topics</a:t>
+            </a:r>
+          </a:p>
+          <a:p>
+            <a:pPr lvl="0"/>
+            <a:r>
+              <a:rPr/>
+              <a:t>Both are large topics…</a:t>
+            </a:r>
+          </a:p>
+          <a:p>
+            <a:pPr lvl="0"/>
+            <a:r>
+              <a:rPr/>
+              <a:t>Interoperability is a pillar of data governance</a:t>
             </a:r>
           </a:p>
         </p:txBody>
@@ -6412,7 +6669,7 @@
             </a:pPr>
             <a:r>
               <a:rPr/>
-              <a:t>Soil data specifics</a:t>
+              <a:t>Data governance</a:t>
             </a:r>
           </a:p>
         </p:txBody>
@@ -6435,35 +6692,35 @@
             <a:pPr lvl="0"/>
             <a:r>
               <a:rPr/>
-              <a:t>legacy data and formats</a:t>
-            </a:r>
-          </a:p>
-          <a:p>
-            <a:pPr lvl="0"/>
-            <a:r>
-              <a:rPr/>
-              <a:t>interaction with many other domains (agriculture, pollution, carbon sequestration, build environment, hydrology)</a:t>
-            </a:r>
-          </a:p>
-          <a:p>
-            <a:pPr lvl="0"/>
-            <a:r>
-              <a:rPr/>
-              <a:t>Management practices &amp; LTE</a:t>
-            </a:r>
-          </a:p>
-          <a:p>
-            <a:pPr lvl="0"/>
-            <a:r>
-              <a:rPr/>
-              <a:t>large number of soil indicators</a:t>
-            </a:r>
-          </a:p>
-          <a:p>
-            <a:pPr lvl="0"/>
-            <a:r>
-              <a:rPr/>
-              <a:t>long history of (local) practices</a:t>
+              <a:t>Roles, Responsibilities, and Accountability</a:t>
+            </a:r>
+          </a:p>
+          <a:p>
+            <a:pPr lvl="0"/>
+            <a:r>
+              <a:rPr/>
+              <a:t>Data Quality and Lifecycle Management</a:t>
+            </a:r>
+          </a:p>
+          <a:p>
+            <a:pPr lvl="0"/>
+            <a:r>
+              <a:rPr/>
+              <a:t>Policies, Standards, and Interoperability</a:t>
+            </a:r>
+          </a:p>
+          <a:p>
+            <a:pPr lvl="0"/>
+            <a:r>
+              <a:rPr/>
+              <a:t>Security, Privacy, and Legal Compliance</a:t>
+            </a:r>
+          </a:p>
+          <a:p>
+            <a:pPr lvl="0"/>
+            <a:r>
+              <a:rPr/>
+              <a:t>Data Sharing, Access, and Value Creation</a:t>
             </a:r>
           </a:p>
         </p:txBody>
@@ -6510,7 +6767,7 @@
             </a:pPr>
             <a:r>
               <a:rPr/>
-              <a:t>Findable data</a:t>
+              <a:t>Soil data specifics</a:t>
             </a:r>
           </a:p>
         </p:txBody>
@@ -6530,12 +6787,31 @@
           <a:bodyPr/>
           <a:lstStyle/>
           <a:p>
-            <a:pPr lvl="0" indent="0" marL="0">
-              <a:buNone/>
-            </a:pPr>
-            <a:r>
-              <a:rPr/>
-              <a:t>Rich metadata searchable via a catalogue</a:t>
+            <a:pPr lvl="0"/>
+            <a:r>
+              <a:rPr/>
+              <a:t>Interaction with many other domains (agriculture, pollution, carbon sequestration, build environment, hydrology)</a:t>
+            </a:r>
+          </a:p>
+          <a:p>
+            <a:pPr lvl="0"/>
+            <a:r>
+              <a:rPr/>
+              <a:t>Property distribution data is predicted, not observed</a:t>
+            </a:r>
+          </a:p>
+          <a:p>
+            <a:pPr lvl="0"/>
+            <a:r>
+              <a:rPr/>
+              <a:t>Long history of (local) practices and standardisation efforts</a:t>
+            </a:r>
+          </a:p>
+          <a:p>
+            <a:pPr lvl="0"/>
+            <a:r>
+              <a:rPr/>
+              <a:t>Legacy data and formats</a:t>
             </a:r>
           </a:p>
         </p:txBody>
